--- a/Week3_Presentation.pptx
+++ b/Week3_Presentation.pptx
@@ -12,9 +12,10 @@
     <p:sldId id="260" r:id="rId6"/>
     <p:sldId id="261" r:id="rId7"/>
     <p:sldId id="262" r:id="rId8"/>
+    <p:sldId id="263" r:id="rId9"/>
   </p:sldIdLst>
   <p:notesMasterIdLst>
-    <p:notesMasterId r:id="rId9"/>
+    <p:notesMasterId r:id="rId10"/>
   </p:notesMasterIdLst>
   <p:sldSz cx="12192000" cy="6858000"/>
   <p:notesSz cx="6858000" cy="12192000"/>
@@ -772,7 +773,7 @@
           <a:p>
             <a:r>
               <a:rPr lang="en-US" dirty="0"/>
-              <a:t>Last week we found the model fails the fairness test for age — young applicants wrongly denied 55% of the time. This week we fixed it. Group-specific thresholds brought the age fairness ratio from 0.56 to 0.86 — now passing — and roughly halved those wrongful denials to 25%. We'd already done the same for sex, 0.83 to 0.98, essentially for free.</a:t>
+              <a:t>Last week we found the model fails the fairness test for age — young applicants wrongly denied 59% of the time. This week we fixed it. Group-specific thresholds brought the age fairness ratio from 0.50 to 0.82 — now passing — and roughly halved those wrongful denials to 29%. We'd already done the same for sex, 0.80 to 0.96, essentially for free.</a:t>
             </a:r>
             <a:endParaRPr lang="en-US" dirty="0"/>
           </a:p>
@@ -860,7 +861,7 @@
           <a:p>
             <a:r>
               <a:rPr lang="en-US" dirty="0"/>
-              <a:t>Here's the honest part. When we applied that same fix to foreign-worker status, it backfired. Fairness improved on paper, but overall recall collapsed from 70% to 50% — because foreign workers are 96% of applicants, so tightening the rule makes the model miss half of all bad loans. The lesson: fairness mitigation is not always free. When the disadvantaged group is a tiny minority, a naive fix trades away the model's whole purpose, so we treat it as a policy decision. Knowing when NOT to auto-fix is the real responsible-AI skill.</a:t>
+              <a:t>Here's the honest part. When we applied that same fix to foreign-worker status, it backfired. Fairness improved on paper, but overall recall collapsed from 76% to 47% — because foreign workers are 96% of applicants, so tightening the rule makes the model miss half of all bad loans. The lesson: fairness mitigation is not always free. When the disadvantaged group is a tiny minority, a naive fix trades away the model's whole purpose, so we treat it as a policy decision. Knowing when NOT to auto-fix is the real responsible-AI skill.</a:t>
             </a:r>
             <a:endParaRPr lang="en-US" dirty="0"/>
           </a:p>
@@ -948,7 +949,7 @@
           <a:p>
             <a:r>
               <a:rPr lang="en-US" dirty="0"/>
-              <a:t>Testing: 38 automated tests at about 99% coverage, set to fail below 80. The point isn't the number — the tests catch real weaknesses, like an invariant that shrinking a loan can never lower approval odds. And we went further: because this is a high-risk system, we attacked our own model and found about half of rejected applicants could game their way to approval by halving their loan.</a:t>
+              <a:t>Testing: 43 automated tests at about 99% coverage, set to fail below 80. The point isn't the number — the tests catch real weaknesses, like an invariant that shrinking a loan can never lower approval odds. And we went further: because this is a high-risk system, we attacked our own model and found over 40% of rejected applicants could game their way to approval by halving their loan.</a:t>
             </a:r>
             <a:endParaRPr lang="en-US" dirty="0"/>
           </a:p>
@@ -1036,7 +1037,7 @@
           <a:p>
             <a:r>
               <a:rPr lang="en-US" dirty="0"/>
-              <a:t>To sum up: this week we didn't just build a model — we understood it with SHAP, tested it thoroughly, and even attacked it to find weaknesses. That's the difference between a model and a responsible, deployable system. Next week is documentation, the management pitch, and extending the fairness fix. Thank you — happy to take questions.</a:t>
+              <a:t>We don't just claim privacy and security — we measured them. Privacy: a membership-inference attack shows only a mild leak, AUC 0.53. Security: three attack studies plus 43 tests and pinned versions. Accountability: a human always decides, every decision is logged with its explanation, and it's all documented. And we're honest about what a student prototype can't do — live logging, monitoring, encryption — which we name as future work rather than hide.</a:t>
             </a:r>
             <a:endParaRPr lang="en-US" dirty="0"/>
           </a:p>
@@ -1060,6 +1061,94 @@
             <a:fld id="{F7021451-1387-4CA6-816F-3879F97B5CBC}" type="slidenum">
               <a:rPr lang="en-US"/>
               <a:t>7</a:t>
+            </a:fld>
+            <a:endParaRPr lang="en-US"/>
+          </a:p>
+        </p:txBody>
+      </p:sp>
+    </p:spTree>
+    <p:extLst>
+      <p:ext uri="{BB962C8B-B14F-4D97-AF65-F5344CB8AC3E}">
+        <p14:creationId xmlns:p14="http://schemas.microsoft.com/office/powerpoint/2010/main" val="1024086991"/>
+      </p:ext>
+    </p:extLst>
+  </p:cSld>
+  <p:clrMapOvr>
+    <a:masterClrMapping/>
+  </p:clrMapOvr>
+</p:notes>
+</file>
+
+<file path=ppt/notesSlides/notesSlide8.xml><?xml version="1.0" encoding="utf-8"?>
+<p:notes xmlns:a="http://schemas.openxmlformats.org/drawingml/2006/main" xmlns:r="http://schemas.openxmlformats.org/officeDocument/2006/relationships" xmlns:p="http://schemas.openxmlformats.org/presentationml/2006/main">
+  <p:cSld>
+    <p:spTree>
+      <p:nvGrpSpPr>
+        <p:cNvPr id="1" name=""/>
+        <p:cNvGrpSpPr/>
+        <p:nvPr/>
+      </p:nvGrpSpPr>
+      <p:grpSpPr>
+        <a:xfrm>
+          <a:off x="0" y="0"/>
+          <a:ext cx="0" cy="0"/>
+          <a:chOff x="0" y="0"/>
+          <a:chExt cx="0" cy="0"/>
+        </a:xfrm>
+      </p:grpSpPr>
+      <p:sp>
+        <p:nvSpPr>
+          <p:cNvPr id="2" name="Slide Image Placeholder 1"/>
+          <p:cNvSpPr>
+            <a:spLocks noGrp="1" noRot="1" noChangeAspect="1"/>
+          </p:cNvSpPr>
+          <p:nvPr>
+            <p:ph type="sldImg"/>
+          </p:nvPr>
+        </p:nvSpPr>
+        <p:spPr/>
+      </p:sp>
+      <p:sp>
+        <p:nvSpPr>
+          <p:cNvPr id="3" name="Notes Placeholder 2"/>
+          <p:cNvSpPr>
+            <a:spLocks noGrp="1"/>
+          </p:cNvSpPr>
+          <p:nvPr>
+            <p:ph type="body" idx="1"/>
+          </p:nvPr>
+        </p:nvSpPr>
+        <p:spPr/>
+        <p:txBody>
+          <a:bodyPr/>
+          <a:lstStyle/>
+          <a:p>
+            <a:r>
+              <a:rPr lang="en-US" dirty="0"/>
+              <a:t>To sum up: this week we didn't just build a model — we understood it with SHAP, tested it thoroughly, and even attacked it to find weaknesses. That's the difference between a model and a responsible, deployable system. Next week is documentation, the management pitch, and extending the fairness fix. Thank you — happy to take questions.</a:t>
+            </a:r>
+            <a:endParaRPr lang="en-US" dirty="0"/>
+          </a:p>
+        </p:txBody>
+      </p:sp>
+      <p:sp>
+        <p:nvSpPr>
+          <p:cNvPr id="4" name="Slide Number Placeholder 3"/>
+          <p:cNvSpPr>
+            <a:spLocks noGrp="1"/>
+          </p:cNvSpPr>
+          <p:nvPr>
+            <p:ph type="sldNum" sz="quarter" idx="10"/>
+          </p:nvPr>
+        </p:nvSpPr>
+        <p:spPr/>
+        <p:txBody>
+          <a:bodyPr/>
+          <a:lstStyle/>
+          <a:p>
+            <a:fld id="{F7021451-1387-4CA6-816F-3879F97B5CBC}" type="slidenum">
+              <a:rPr lang="en-US"/>
+              <a:t>8</a:t>
             </a:fld>
             <a:endParaRPr lang="en-US"/>
           </a:p>
@@ -1715,7 +1804,7 @@
                 <a:ea typeface="Calibri" pitchFamily="34" charset="-122"/>
                 <a:cs typeface="Calibri" pitchFamily="34" charset="-120"/>
               </a:rPr>
-              <a:t>38 tests · 99% coverage</a:t>
+              <a:t>43 tests · 99% coverage</a:t>
             </a:r>
             <a:endParaRPr lang="en-US" sz="1350" dirty="0"/>
           </a:p>
@@ -2815,7 +2904,7 @@
                 <a:ea typeface="Cambria" pitchFamily="34" charset="-122"/>
                 <a:cs typeface="Cambria" pitchFamily="34" charset="-120"/>
               </a:rPr>
-              <a:t>0.83  →  0.98</a:t>
+              <a:t>0.80  →  0.96</a:t>
             </a:r>
             <a:endParaRPr lang="en-US" sz="4800" dirty="0"/>
           </a:p>
@@ -2961,7 +3050,7 @@
                 <a:ea typeface="Cambria" pitchFamily="34" charset="-122"/>
                 <a:cs typeface="Cambria" pitchFamily="34" charset="-120"/>
               </a:rPr>
-              <a:t>0.56  →  0.86</a:t>
+              <a:t>0.50  →  0.82</a:t>
             </a:r>
             <a:endParaRPr lang="en-US" sz="4800" dirty="0"/>
           </a:p>
@@ -3068,7 +3157,7 @@
                 <a:ea typeface="Cambria" pitchFamily="34" charset="-122"/>
                 <a:cs typeface="Cambria" pitchFamily="34" charset="-120"/>
               </a:rPr>
-              <a:t>55%  →  25%</a:t>
+              <a:t>59%  →  29%</a:t>
             </a:r>
             <a:endParaRPr lang="en-US" sz="4000" dirty="0"/>
           </a:p>
@@ -3324,7 +3413,7 @@
                 <a:ea typeface="Cambria" pitchFamily="34" charset="-122"/>
                 <a:cs typeface="Cambria" pitchFamily="34" charset="-120"/>
               </a:rPr>
-              <a:t>0.73 → 0.88</a:t>
+              <a:t>0.71 → 0.93</a:t>
             </a:r>
             <a:endParaRPr lang="en-US" sz="4000" dirty="0"/>
           </a:p>
@@ -3431,7 +3520,7 @@
                 <a:ea typeface="Cambria" pitchFamily="34" charset="-122"/>
                 <a:cs typeface="Cambria" pitchFamily="34" charset="-120"/>
               </a:rPr>
-              <a:t>0.70 → 0.50</a:t>
+              <a:t>0.76 → 0.47</a:t>
             </a:r>
             <a:endParaRPr lang="en-US" sz="4000" dirty="0"/>
           </a:p>
@@ -4153,7 +4242,7 @@
                 <a:ea typeface="Cambria" pitchFamily="34" charset="-122"/>
                 <a:cs typeface="Cambria" pitchFamily="34" charset="-120"/>
               </a:rPr>
-              <a:t>~52%</a:t>
+              <a:t>~41%</a:t>
             </a:r>
             <a:endParaRPr lang="en-US" sz="4000" dirty="0"/>
           </a:p>
@@ -4209,6 +4298,655 @@
 <file path=ppt/slides/slide7.xml><?xml version="1.0" encoding="utf-8"?>
 <p:sld xmlns:a="http://schemas.openxmlformats.org/drawingml/2006/main" xmlns:r="http://schemas.openxmlformats.org/officeDocument/2006/relationships" xmlns:p="http://schemas.openxmlformats.org/presentationml/2006/main">
   <p:cSld name="Slide 7">
+    <p:bg>
+      <p:bgPr>
+        <a:solidFill>
+          <a:srgbClr val="FFFFFF"/>
+        </a:solidFill>
+      </p:bgPr>
+    </p:bg>
+    <p:spTree>
+      <p:nvGrpSpPr>
+        <p:cNvPr id="1" name=""/>
+        <p:cNvGrpSpPr/>
+        <p:nvPr/>
+      </p:nvGrpSpPr>
+      <p:grpSpPr>
+        <a:xfrm>
+          <a:off x="0" y="0"/>
+          <a:ext cx="0" cy="0"/>
+          <a:chOff x="0" y="0"/>
+          <a:chExt cx="0" cy="0"/>
+        </a:xfrm>
+      </p:grpSpPr>
+      <p:sp>
+        <p:nvSpPr>
+          <p:cNvPr id="2" name="Text 0"/>
+          <p:cNvSpPr/>
+          <p:nvPr/>
+        </p:nvSpPr>
+        <p:spPr>
+          <a:xfrm>
+            <a:off x="548640" y="411480"/>
+            <a:ext cx="10972800" cy="274320"/>
+          </a:xfrm>
+          <a:prstGeom prst="rect">
+            <a:avLst/>
+          </a:prstGeom>
+          <a:noFill/>
+          <a:ln/>
+        </p:spPr>
+        <p:txBody>
+          <a:bodyPr wrap="square" lIns="0" tIns="0" rIns="0" bIns="0" rtlCol="0" anchor="ctr"/>
+          <a:lstStyle/>
+          <a:p>
+            <a:pPr indent="0" marL="0">
+              <a:buNone/>
+            </a:pPr>
+            <a:r>
+              <a:rPr lang="en-US" sz="1300" b="1" spc="200" kern="0" dirty="0">
+                <a:solidFill>
+                  <a:srgbClr val="2A78D6"/>
+                </a:solidFill>
+                <a:latin typeface="Calibri" pitchFamily="34" charset="0"/>
+                <a:ea typeface="Calibri" pitchFamily="34" charset="-122"/>
+                <a:cs typeface="Calibri" pitchFamily="34" charset="-120"/>
+              </a:rPr>
+              <a:t>RESPONSIBLE AI · SAFEGUARDS</a:t>
+            </a:r>
+            <a:endParaRPr lang="en-US" sz="1300" dirty="0"/>
+          </a:p>
+        </p:txBody>
+      </p:sp>
+      <p:sp>
+        <p:nvSpPr>
+          <p:cNvPr id="3" name="Text 1"/>
+          <p:cNvSpPr/>
+          <p:nvPr/>
+        </p:nvSpPr>
+        <p:spPr>
+          <a:xfrm>
+            <a:off x="548640" y="658368"/>
+            <a:ext cx="11064240" cy="822960"/>
+          </a:xfrm>
+          <a:prstGeom prst="rect">
+            <a:avLst/>
+          </a:prstGeom>
+          <a:noFill/>
+          <a:ln/>
+        </p:spPr>
+        <p:txBody>
+          <a:bodyPr wrap="square" lIns="0" tIns="0" rIns="0" bIns="0" rtlCol="0" anchor="ctr"/>
+          <a:lstStyle/>
+          <a:p>
+            <a:pPr indent="0" marL="0">
+              <a:buNone/>
+            </a:pPr>
+            <a:r>
+              <a:rPr lang="en-US" sz="3400" b="1" dirty="0">
+                <a:solidFill>
+                  <a:srgbClr val="22252E"/>
+                </a:solidFill>
+                <a:latin typeface="Cambria" pitchFamily="34" charset="0"/>
+                <a:ea typeface="Cambria" pitchFamily="34" charset="-122"/>
+                <a:cs typeface="Cambria" pitchFamily="34" charset="-120"/>
+              </a:rPr>
+              <a:t>Privacy, Security &amp; Accountability</a:t>
+            </a:r>
+            <a:endParaRPr lang="en-US" sz="3400" dirty="0"/>
+          </a:p>
+        </p:txBody>
+      </p:sp>
+      <p:sp>
+        <p:nvSpPr>
+          <p:cNvPr id="4" name="Shape 2"/>
+          <p:cNvSpPr/>
+          <p:nvPr/>
+        </p:nvSpPr>
+        <p:spPr>
+          <a:xfrm>
+            <a:off x="548640" y="1828800"/>
+            <a:ext cx="3520440" cy="2971800"/>
+          </a:xfrm>
+          <a:prstGeom prst="roundRect">
+            <a:avLst>
+              <a:gd name="adj" fmla="val 3077"/>
+            </a:avLst>
+          </a:prstGeom>
+          <a:solidFill>
+            <a:srgbClr val="FFFFFF"/>
+          </a:solidFill>
+          <a:ln/>
+          <a:effectLst>
+            <a:outerShdw sx="100000" sy="100000" kx="0" ky="0" algn="bl" rotWithShape="0" blurRad="101600" dist="38100" dir="5400000">
+              <a:srgbClr val="8090A8">
+                <a:alpha val="30000"/>
+              </a:srgbClr>
+            </a:outerShdw>
+          </a:effectLst>
+        </p:spPr>
+      </p:sp>
+      <p:sp>
+        <p:nvSpPr>
+          <p:cNvPr id="5" name="Text 3"/>
+          <p:cNvSpPr/>
+          <p:nvPr/>
+        </p:nvSpPr>
+        <p:spPr>
+          <a:xfrm>
+            <a:off x="804672" y="2011680"/>
+            <a:ext cx="3108960" cy="365760"/>
+          </a:xfrm>
+          <a:prstGeom prst="rect">
+            <a:avLst/>
+          </a:prstGeom>
+          <a:noFill/>
+          <a:ln/>
+        </p:spPr>
+        <p:txBody>
+          <a:bodyPr wrap="square" lIns="0" tIns="0" rIns="0" bIns="0" rtlCol="0" anchor="ctr"/>
+          <a:lstStyle/>
+          <a:p>
+            <a:pPr indent="0" marL="0">
+              <a:buNone/>
+            </a:pPr>
+            <a:r>
+              <a:rPr lang="en-US" sz="1500" b="1" spc="100" kern="0" dirty="0">
+                <a:solidFill>
+                  <a:srgbClr val="2A78D6"/>
+                </a:solidFill>
+                <a:latin typeface="Calibri" pitchFamily="34" charset="0"/>
+                <a:ea typeface="Calibri" pitchFamily="34" charset="-122"/>
+                <a:cs typeface="Calibri" pitchFamily="34" charset="-120"/>
+              </a:rPr>
+              <a:t>PRIVACY</a:t>
+            </a:r>
+            <a:endParaRPr lang="en-US" sz="1500" dirty="0"/>
+          </a:p>
+        </p:txBody>
+      </p:sp>
+      <p:sp>
+        <p:nvSpPr>
+          <p:cNvPr id="6" name="Text 4"/>
+          <p:cNvSpPr/>
+          <p:nvPr/>
+        </p:nvSpPr>
+        <p:spPr>
+          <a:xfrm>
+            <a:off x="804672" y="2487168"/>
+            <a:ext cx="3063240" cy="2194560"/>
+          </a:xfrm>
+          <a:prstGeom prst="rect">
+            <a:avLst/>
+          </a:prstGeom>
+          <a:noFill/>
+          <a:ln/>
+        </p:spPr>
+        <p:txBody>
+          <a:bodyPr wrap="square" lIns="0" tIns="0" rIns="0" bIns="0" rtlCol="0" anchor="t"/>
+          <a:lstStyle/>
+          <a:p>
+            <a:pPr marL="177800" indent="-177800">
+              <a:spcAft>
+                <a:spcPts val="900"/>
+              </a:spcAft>
+              <a:buSzPct val="100000"/>
+              <a:buChar char="•"/>
+            </a:pPr>
+            <a:r>
+              <a:rPr lang="en-US" sz="1250" dirty="0">
+                <a:solidFill>
+                  <a:srgbClr val="22252E"/>
+                </a:solidFill>
+              </a:rPr>
+              <a:t>Membership-inference tested → mild leak (attack AUC 0.53)</a:t>
+            </a:r>
+            <a:endParaRPr lang="en-US" sz="1250" dirty="0"/>
+          </a:p>
+          <a:p>
+            <a:pPr marL="177800" indent="-177800">
+              <a:spcAft>
+                <a:spcPts val="900"/>
+              </a:spcAft>
+              <a:buSzPct val="100000"/>
+              <a:buChar char="•"/>
+            </a:pPr>
+            <a:r>
+              <a:rPr lang="en-US" sz="1250" dirty="0">
+                <a:solidFill>
+                  <a:srgbClr val="22252E"/>
+                </a:solidFill>
+              </a:rPr>
+              <a:t>Data minimisation: only credit-relevant features used</a:t>
+            </a:r>
+            <a:endParaRPr lang="en-US" sz="1250" dirty="0"/>
+          </a:p>
+          <a:p>
+            <a:pPr marL="177800" indent="-177800">
+              <a:spcAft>
+                <a:spcPts val="900"/>
+              </a:spcAft>
+              <a:buSzPct val="100000"/>
+              <a:buChar char="•"/>
+            </a:pPr>
+            <a:r>
+              <a:rPr lang="en-US" sz="1250" dirty="0">
+                <a:solidFill>
+                  <a:srgbClr val="22252E"/>
+                </a:solidFill>
+              </a:rPr>
+              <a:t>Per-decision explanation (SHAP) — GDPR Art. 22 &amp; 25</a:t>
+            </a:r>
+            <a:endParaRPr lang="en-US" sz="1250" dirty="0"/>
+          </a:p>
+        </p:txBody>
+      </p:sp>
+      <p:sp>
+        <p:nvSpPr>
+          <p:cNvPr id="7" name="Shape 5"/>
+          <p:cNvSpPr/>
+          <p:nvPr/>
+        </p:nvSpPr>
+        <p:spPr>
+          <a:xfrm>
+            <a:off x="4325112" y="1828800"/>
+            <a:ext cx="3520440" cy="2971800"/>
+          </a:xfrm>
+          <a:prstGeom prst="roundRect">
+            <a:avLst>
+              <a:gd name="adj" fmla="val 3077"/>
+            </a:avLst>
+          </a:prstGeom>
+          <a:solidFill>
+            <a:srgbClr val="FFFFFF"/>
+          </a:solidFill>
+          <a:ln/>
+          <a:effectLst>
+            <a:outerShdw sx="100000" sy="100000" kx="0" ky="0" algn="bl" rotWithShape="0" blurRad="101600" dist="38100" dir="5400000">
+              <a:srgbClr val="8090A8">
+                <a:alpha val="30000"/>
+              </a:srgbClr>
+            </a:outerShdw>
+          </a:effectLst>
+        </p:spPr>
+      </p:sp>
+      <p:sp>
+        <p:nvSpPr>
+          <p:cNvPr id="8" name="Text 6"/>
+          <p:cNvSpPr/>
+          <p:nvPr/>
+        </p:nvSpPr>
+        <p:spPr>
+          <a:xfrm>
+            <a:off x="4581144" y="2011680"/>
+            <a:ext cx="3108960" cy="365760"/>
+          </a:xfrm>
+          <a:prstGeom prst="rect">
+            <a:avLst/>
+          </a:prstGeom>
+          <a:noFill/>
+          <a:ln/>
+        </p:spPr>
+        <p:txBody>
+          <a:bodyPr wrap="square" lIns="0" tIns="0" rIns="0" bIns="0" rtlCol="0" anchor="ctr"/>
+          <a:lstStyle/>
+          <a:p>
+            <a:pPr indent="0" marL="0">
+              <a:buNone/>
+            </a:pPr>
+            <a:r>
+              <a:rPr lang="en-US" sz="1500" b="1" spc="100" kern="0" dirty="0">
+                <a:solidFill>
+                  <a:srgbClr val="1BA37A"/>
+                </a:solidFill>
+                <a:latin typeface="Calibri" pitchFamily="34" charset="0"/>
+                <a:ea typeface="Calibri" pitchFamily="34" charset="-122"/>
+                <a:cs typeface="Calibri" pitchFamily="34" charset="-120"/>
+              </a:rPr>
+              <a:t>SECURITY</a:t>
+            </a:r>
+            <a:endParaRPr lang="en-US" sz="1500" dirty="0"/>
+          </a:p>
+        </p:txBody>
+      </p:sp>
+      <p:sp>
+        <p:nvSpPr>
+          <p:cNvPr id="9" name="Text 7"/>
+          <p:cNvSpPr/>
+          <p:nvPr/>
+        </p:nvSpPr>
+        <p:spPr>
+          <a:xfrm>
+            <a:off x="4581144" y="2487168"/>
+            <a:ext cx="3063240" cy="2194560"/>
+          </a:xfrm>
+          <a:prstGeom prst="rect">
+            <a:avLst/>
+          </a:prstGeom>
+          <a:noFill/>
+          <a:ln/>
+        </p:spPr>
+        <p:txBody>
+          <a:bodyPr wrap="square" lIns="0" tIns="0" rIns="0" bIns="0" rtlCol="0" anchor="t"/>
+          <a:lstStyle/>
+          <a:p>
+            <a:pPr marL="177800" indent="-177800">
+              <a:spcAft>
+                <a:spcPts val="900"/>
+              </a:spcAft>
+              <a:buSzPct val="100000"/>
+              <a:buChar char="•"/>
+            </a:pPr>
+            <a:r>
+              <a:rPr lang="en-US" sz="1250" dirty="0">
+                <a:solidFill>
+                  <a:srgbClr val="22252E"/>
+                </a:solidFill>
+              </a:rPr>
+              <a:t>3 attacks quantified: evasion, poisoning, privacy</a:t>
+            </a:r>
+            <a:endParaRPr lang="en-US" sz="1250" dirty="0"/>
+          </a:p>
+          <a:p>
+            <a:pPr marL="177800" indent="-177800">
+              <a:spcAft>
+                <a:spcPts val="900"/>
+              </a:spcAft>
+              <a:buSzPct val="100000"/>
+              <a:buChar char="•"/>
+            </a:pPr>
+            <a:r>
+              <a:rPr lang="en-US" sz="1250" dirty="0">
+                <a:solidFill>
+                  <a:srgbClr val="22252E"/>
+                </a:solidFill>
+              </a:rPr>
+              <a:t>43 tests guard correctness against regressions</a:t>
+            </a:r>
+            <a:endParaRPr lang="en-US" sz="1250" dirty="0"/>
+          </a:p>
+          <a:p>
+            <a:pPr marL="177800" indent="-177800">
+              <a:spcAft>
+                <a:spcPts val="900"/>
+              </a:spcAft>
+              <a:buSzPct val="100000"/>
+              <a:buChar char="•"/>
+            </a:pPr>
+            <a:r>
+              <a:rPr lang="en-US" sz="1250" dirty="0">
+                <a:solidFill>
+                  <a:srgbClr val="22252E"/>
+                </a:solidFill>
+              </a:rPr>
+              <a:t>Pinned library versions — EU AI Act Art. 15</a:t>
+            </a:r>
+            <a:endParaRPr lang="en-US" sz="1250" dirty="0"/>
+          </a:p>
+        </p:txBody>
+      </p:sp>
+      <p:sp>
+        <p:nvSpPr>
+          <p:cNvPr id="10" name="Shape 8"/>
+          <p:cNvSpPr/>
+          <p:nvPr/>
+        </p:nvSpPr>
+        <p:spPr>
+          <a:xfrm>
+            <a:off x="8101584" y="1828800"/>
+            <a:ext cx="3520440" cy="2971800"/>
+          </a:xfrm>
+          <a:prstGeom prst="roundRect">
+            <a:avLst>
+              <a:gd name="adj" fmla="val 3077"/>
+            </a:avLst>
+          </a:prstGeom>
+          <a:solidFill>
+            <a:srgbClr val="FFFFFF"/>
+          </a:solidFill>
+          <a:ln/>
+          <a:effectLst>
+            <a:outerShdw sx="100000" sy="100000" kx="0" ky="0" algn="bl" rotWithShape="0" blurRad="101600" dist="38100" dir="5400000">
+              <a:srgbClr val="8090A8">
+                <a:alpha val="30000"/>
+              </a:srgbClr>
+            </a:outerShdw>
+          </a:effectLst>
+        </p:spPr>
+      </p:sp>
+      <p:sp>
+        <p:nvSpPr>
+          <p:cNvPr id="11" name="Text 9"/>
+          <p:cNvSpPr/>
+          <p:nvPr/>
+        </p:nvSpPr>
+        <p:spPr>
+          <a:xfrm>
+            <a:off x="8357616" y="2011680"/>
+            <a:ext cx="3108960" cy="365760"/>
+          </a:xfrm>
+          <a:prstGeom prst="rect">
+            <a:avLst/>
+          </a:prstGeom>
+          <a:noFill/>
+          <a:ln/>
+        </p:spPr>
+        <p:txBody>
+          <a:bodyPr wrap="square" lIns="0" tIns="0" rIns="0" bIns="0" rtlCol="0" anchor="ctr"/>
+          <a:lstStyle/>
+          <a:p>
+            <a:pPr indent="0" marL="0">
+              <a:buNone/>
+            </a:pPr>
+            <a:r>
+              <a:rPr lang="en-US" sz="1500" b="1" spc="100" kern="0" dirty="0">
+                <a:solidFill>
+                  <a:srgbClr val="7A54B0"/>
+                </a:solidFill>
+                <a:latin typeface="Calibri" pitchFamily="34" charset="0"/>
+                <a:ea typeface="Calibri" pitchFamily="34" charset="-122"/>
+                <a:cs typeface="Calibri" pitchFamily="34" charset="-120"/>
+              </a:rPr>
+              <a:t>ACCOUNTABILITY</a:t>
+            </a:r>
+            <a:endParaRPr lang="en-US" sz="1500" dirty="0"/>
+          </a:p>
+        </p:txBody>
+      </p:sp>
+      <p:sp>
+        <p:nvSpPr>
+          <p:cNvPr id="12" name="Text 10"/>
+          <p:cNvSpPr/>
+          <p:nvPr/>
+        </p:nvSpPr>
+        <p:spPr>
+          <a:xfrm>
+            <a:off x="8357616" y="2487168"/>
+            <a:ext cx="3063240" cy="2194560"/>
+          </a:xfrm>
+          <a:prstGeom prst="rect">
+            <a:avLst/>
+          </a:prstGeom>
+          <a:noFill/>
+          <a:ln/>
+        </p:spPr>
+        <p:txBody>
+          <a:bodyPr wrap="square" lIns="0" tIns="0" rIns="0" bIns="0" rtlCol="0" anchor="t"/>
+          <a:lstStyle/>
+          <a:p>
+            <a:pPr marL="177800" indent="-177800">
+              <a:spcAft>
+                <a:spcPts val="900"/>
+              </a:spcAft>
+              <a:buSzPct val="100000"/>
+              <a:buChar char="•"/>
+            </a:pPr>
+            <a:r>
+              <a:rPr lang="en-US" sz="1250" dirty="0">
+                <a:solidFill>
+                  <a:srgbClr val="22252E"/>
+                </a:solidFill>
+              </a:rPr>
+              <a:t>Human-in-the-loop — never autonomous (Art. 14)</a:t>
+            </a:r>
+            <a:endParaRPr lang="en-US" sz="1250" dirty="0"/>
+          </a:p>
+          <a:p>
+            <a:pPr marL="177800" indent="-177800">
+              <a:spcAft>
+                <a:spcPts val="900"/>
+              </a:spcAft>
+              <a:buSzPct val="100000"/>
+              <a:buChar char="•"/>
+            </a:pPr>
+            <a:r>
+              <a:rPr lang="en-US" sz="1250" dirty="0">
+                <a:solidFill>
+                  <a:srgbClr val="22252E"/>
+                </a:solidFill>
+              </a:rPr>
+              <a:t>Each decision logged with inputs + explanation</a:t>
+            </a:r>
+            <a:endParaRPr lang="en-US" sz="1250" dirty="0"/>
+          </a:p>
+          <a:p>
+            <a:pPr marL="177800" indent="-177800">
+              <a:spcAft>
+                <a:spcPts val="900"/>
+              </a:spcAft>
+              <a:buSzPct val="100000"/>
+              <a:buChar char="•"/>
+            </a:pPr>
+            <a:r>
+              <a:rPr lang="en-US" sz="1250" dirty="0">
+                <a:solidFill>
+                  <a:srgbClr val="22252E"/>
+                </a:solidFill>
+              </a:rPr>
+              <a:t>Model card + regulatory analysis documented</a:t>
+            </a:r>
+            <a:endParaRPr lang="en-US" sz="1250" dirty="0"/>
+          </a:p>
+        </p:txBody>
+      </p:sp>
+      <p:sp>
+        <p:nvSpPr>
+          <p:cNvPr id="13" name="Shape 11"/>
+          <p:cNvSpPr/>
+          <p:nvPr/>
+        </p:nvSpPr>
+        <p:spPr>
+          <a:xfrm>
+            <a:off x="548640" y="5029200"/>
+            <a:ext cx="11091672" cy="1097280"/>
+          </a:xfrm>
+          <a:prstGeom prst="roundRect">
+            <a:avLst>
+              <a:gd name="adj" fmla="val 8333"/>
+            </a:avLst>
+          </a:prstGeom>
+          <a:solidFill>
+            <a:srgbClr val="1E2761"/>
+          </a:solidFill>
+          <a:ln/>
+          <a:effectLst>
+            <a:outerShdw sx="100000" sy="100000" kx="0" ky="0" algn="bl" rotWithShape="0" blurRad="101600" dist="38100" dir="5400000">
+              <a:srgbClr val="8090A8">
+                <a:alpha val="30000"/>
+              </a:srgbClr>
+            </a:outerShdw>
+          </a:effectLst>
+        </p:spPr>
+      </p:sp>
+      <p:sp>
+        <p:nvSpPr>
+          <p:cNvPr id="14" name="Text 12"/>
+          <p:cNvSpPr/>
+          <p:nvPr/>
+        </p:nvSpPr>
+        <p:spPr>
+          <a:xfrm>
+            <a:off x="822960" y="5193792"/>
+            <a:ext cx="10515600" cy="320040"/>
+          </a:xfrm>
+          <a:prstGeom prst="rect">
+            <a:avLst/>
+          </a:prstGeom>
+          <a:noFill/>
+          <a:ln/>
+        </p:spPr>
+        <p:txBody>
+          <a:bodyPr wrap="square" lIns="0" tIns="0" rIns="0" bIns="0" rtlCol="0" anchor="ctr"/>
+          <a:lstStyle/>
+          <a:p>
+            <a:pPr indent="0" marL="0">
+              <a:buNone/>
+            </a:pPr>
+            <a:r>
+              <a:rPr lang="en-US" sz="1400" b="1" dirty="0">
+                <a:solidFill>
+                  <a:srgbClr val="CADCFC"/>
+                </a:solidFill>
+                <a:latin typeface="Calibri" pitchFamily="34" charset="0"/>
+                <a:ea typeface="Calibri" pitchFamily="34" charset="-122"/>
+                <a:cs typeface="Calibri" pitchFamily="34" charset="-120"/>
+              </a:rPr>
+              <a:t>Honest gaps (named, not hidden):</a:t>
+            </a:r>
+            <a:endParaRPr lang="en-US" sz="1400" dirty="0"/>
+          </a:p>
+        </p:txBody>
+      </p:sp>
+      <p:sp>
+        <p:nvSpPr>
+          <p:cNvPr id="15" name="Text 13"/>
+          <p:cNvSpPr/>
+          <p:nvPr/>
+        </p:nvSpPr>
+        <p:spPr>
+          <a:xfrm>
+            <a:off x="822960" y="5504688"/>
+            <a:ext cx="10515600" cy="548640"/>
+          </a:xfrm>
+          <a:prstGeom prst="rect">
+            <a:avLst/>
+          </a:prstGeom>
+          <a:noFill/>
+          <a:ln/>
+        </p:spPr>
+        <p:txBody>
+          <a:bodyPr wrap="square" lIns="0" tIns="0" rIns="0" bIns="0" rtlCol="0" anchor="ctr"/>
+          <a:lstStyle/>
+          <a:p>
+            <a:pPr indent="0" marL="0">
+              <a:buNone/>
+            </a:pPr>
+            <a:r>
+              <a:rPr lang="en-US" sz="1300" dirty="0">
+                <a:solidFill>
+                  <a:srgbClr val="FFFFFF"/>
+                </a:solidFill>
+                <a:latin typeface="Calibri" pitchFamily="34" charset="0"/>
+                <a:ea typeface="Calibri" pitchFamily="34" charset="-122"/>
+                <a:cs typeface="Calibri" pitchFamily="34" charset="-120"/>
+              </a:rPr>
+              <a:t>production event logging · post-market monitoring · encryption &amp; access control — this is a student prototype, not a deployed bank system. Naming the gaps is itself what the AI Act's continuous risk management expects.</a:t>
+            </a:r>
+            <a:endParaRPr lang="en-US" sz="1300" dirty="0"/>
+          </a:p>
+        </p:txBody>
+      </p:sp>
+    </p:spTree>
+  </p:cSld>
+  <p:clrMapOvr>
+    <a:masterClrMapping/>
+  </p:clrMapOvr>
+</p:sld>
+</file>
+
+<file path=ppt/slides/slide8.xml><?xml version="1.0" encoding="utf-8"?>
+<p:sld xmlns:a="http://schemas.openxmlformats.org/drawingml/2006/main" xmlns:r="http://schemas.openxmlformats.org/officeDocument/2006/relationships" xmlns:p="http://schemas.openxmlformats.org/presentationml/2006/main">
+  <p:cSld name="Slide 8">
     <p:bg>
       <p:bgPr>
         <a:solidFill>
@@ -4576,7 +5314,7 @@
                 <a:ea typeface="Calibri" pitchFamily="34" charset="-122"/>
                 <a:cs typeface="Calibri" pitchFamily="34" charset="-120"/>
               </a:rPr>
-              <a:t>38 tests at 99% coverage catch real weaknesses automatically.</a:t>
+              <a:t>43 tests at 99% coverage catch real weaknesses automatically.</a:t>
             </a:r>
             <a:endParaRPr lang="en-US" sz="1400" dirty="0"/>
           </a:p>
